--- a/outdoor_seld_e2e/md/seminar/相談会スライド_機材購入_2026-09-15.pptx
+++ b/outdoor_seld_e2e/md/seminar/相談会スライド_機材購入_2026-09-15.pptx
@@ -6128,7 +6128,7 @@
                 <a:latin typeface="Meiryo"/>
                 <a:ea typeface="メイリオ"/>
               </a:rPr>
-              <a:t>修士でも使い続ける</a:t>
+              <a:t>修士の測定の基準器になる</a:t>
             </a:r>
           </a:p>
         </p:txBody>
@@ -6168,7 +6168,7 @@
                 <a:latin typeface="Meiryo"/>
                 <a:ea typeface="メイリオ"/>
               </a:rPr>
-              <a:t>夏ゼミで「デバイス試作は修士を見越したものか」と問われ、そのつもりとお答えしました。修士の収録とデモでも使うので、2年半使う備品になります。</a:t>
+              <a:t>修士でデバイスを作ると自前のマイクが要りますが、その正しさは較正済みの機材と同じ場面を録って突き合わせる以外に確かめようがありません。2年半使う備品になります。</a:t>
             </a:r>
           </a:p>
         </p:txBody>
